--- a/assets/powerpoints/module-deplacement/C3-celui-celle-ceux.pptx
+++ b/assets/powerpoints/module-deplacement/C3-celui-celle-ceux.pptx
@@ -8835,7 +8835,97 @@
                 </a:solidFill>
                 <a:latin typeface="Verdana"/>
               </a:rPr>
-              <a:t>Quatre suites possibles : &lt;b&gt;-là&lt;/b&gt; (celui-là), &lt;b&gt;qui&lt;/b&gt; (celui qui va vers…), &lt;b&gt;que&lt;/b&gt; (celui que je prends), &lt;b&gt;de&lt;/b&gt; (celui de 7 h 51). « Celui » tout seul n'existe pas. Dans le doute, employez &lt;b&gt;-là&lt;/b&gt;.</a:t>
+              <a:t>Quatre suites possibles : </a:t>
+            </a:r>
+            <a:r>
+              <a:rPr sz="2000" b="1" i="0">
+                <a:solidFill>
+                  <a:srgbClr val="4B4F52"/>
+                </a:solidFill>
+                <a:latin typeface="Verdana"/>
+              </a:rPr>
+              <a:t>-là</a:t>
+            </a:r>
+            <a:r>
+              <a:rPr sz="2000" b="0" i="0">
+                <a:solidFill>
+                  <a:srgbClr val="4B4F52"/>
+                </a:solidFill>
+                <a:latin typeface="Verdana"/>
+              </a:rPr>
+              <a:t> (celui-là), </a:t>
+            </a:r>
+            <a:r>
+              <a:rPr sz="2000" b="1" i="0">
+                <a:solidFill>
+                  <a:srgbClr val="4B4F52"/>
+                </a:solidFill>
+                <a:latin typeface="Verdana"/>
+              </a:rPr>
+              <a:t>qui</a:t>
+            </a:r>
+            <a:r>
+              <a:rPr sz="2000" b="0" i="0">
+                <a:solidFill>
+                  <a:srgbClr val="4B4F52"/>
+                </a:solidFill>
+                <a:latin typeface="Verdana"/>
+              </a:rPr>
+              <a:t> (celui qui va vers…), </a:t>
+            </a:r>
+            <a:r>
+              <a:rPr sz="2000" b="1" i="0">
+                <a:solidFill>
+                  <a:srgbClr val="4B4F52"/>
+                </a:solidFill>
+                <a:latin typeface="Verdana"/>
+              </a:rPr>
+              <a:t>que</a:t>
+            </a:r>
+            <a:r>
+              <a:rPr sz="2000" b="0" i="0">
+                <a:solidFill>
+                  <a:srgbClr val="4B4F52"/>
+                </a:solidFill>
+                <a:latin typeface="Verdana"/>
+              </a:rPr>
+              <a:t> (celui que je prends), </a:t>
+            </a:r>
+            <a:r>
+              <a:rPr sz="2000" b="1" i="0">
+                <a:solidFill>
+                  <a:srgbClr val="4B4F52"/>
+                </a:solidFill>
+                <a:latin typeface="Verdana"/>
+              </a:rPr>
+              <a:t>de</a:t>
+            </a:r>
+            <a:r>
+              <a:rPr sz="2000" b="0" i="0">
+                <a:solidFill>
+                  <a:srgbClr val="4B4F52"/>
+                </a:solidFill>
+                <a:latin typeface="Verdana"/>
+              </a:rPr>
+              <a:t> (celui de 7 h 51). « Celui » tout seul n'existe pas. Dans le doute, employez </a:t>
+            </a:r>
+            <a:r>
+              <a:rPr sz="2000" b="1" i="0">
+                <a:solidFill>
+                  <a:srgbClr val="4B4F52"/>
+                </a:solidFill>
+                <a:latin typeface="Verdana"/>
+              </a:rPr>
+              <a:t>-là</a:t>
+            </a:r>
+            <a:r>
+              <a:rPr sz="2000" b="0" i="0">
+                <a:solidFill>
+                  <a:srgbClr val="4B4F52"/>
+                </a:solidFill>
+                <a:latin typeface="Verdana"/>
+              </a:rPr>
+              <a:t>.</a:t>
             </a:r>
           </a:p>
         </p:txBody>
@@ -9182,7 +9272,43 @@
                 </a:solidFill>
                 <a:latin typeface="Verdana"/>
               </a:rPr>
-              <a:t>« Celui &lt;b&gt;qui&lt;/b&gt; va vers Gaétan-Boucher » : après qui, un verbe. « Celui &lt;b&gt;que&lt;/b&gt; je prends » : après que, un sujet. Rien de nouveau à apprendre — c'est la même règle, appliquée après un autre mot.</a:t>
+              <a:t>« Celui </a:t>
+            </a:r>
+            <a:r>
+              <a:rPr sz="2000" b="1" i="0">
+                <a:solidFill>
+                  <a:srgbClr val="4B4F52"/>
+                </a:solidFill>
+                <a:latin typeface="Verdana"/>
+              </a:rPr>
+              <a:t>qui</a:t>
+            </a:r>
+            <a:r>
+              <a:rPr sz="2000" b="0" i="0">
+                <a:solidFill>
+                  <a:srgbClr val="4B4F52"/>
+                </a:solidFill>
+                <a:latin typeface="Verdana"/>
+              </a:rPr>
+              <a:t> va vers Gaétan-Boucher » : après qui, un verbe. « Celui </a:t>
+            </a:r>
+            <a:r>
+              <a:rPr sz="2000" b="1" i="0">
+                <a:solidFill>
+                  <a:srgbClr val="4B4F52"/>
+                </a:solidFill>
+                <a:latin typeface="Verdana"/>
+              </a:rPr>
+              <a:t>que</a:t>
+            </a:r>
+            <a:r>
+              <a:rPr sz="2000" b="0" i="0">
+                <a:solidFill>
+                  <a:srgbClr val="4B4F52"/>
+                </a:solidFill>
+                <a:latin typeface="Verdana"/>
+              </a:rPr>
+              <a:t> je prends » : après que, un sujet. Rien de nouveau à apprendre — c'est la même règle, appliquée après un autre mot.</a:t>
             </a:r>
           </a:p>
         </p:txBody>
@@ -9725,13 +9851,94 @@
               </a:lnSpc>
             </a:pPr>
             <a:r>
+              <a:rPr sz="2000" b="1" i="0">
+                <a:solidFill>
+                  <a:srgbClr val="4B4F52"/>
+                </a:solidFill>
+                <a:latin typeface="Verdana"/>
+              </a:rPr>
+              <a:t>ce</a:t>
+            </a:r>
+            <a:r>
               <a:rPr sz="2000" b="0" i="0">
                 <a:solidFill>
                   <a:srgbClr val="4B4F52"/>
                 </a:solidFill>
                 <a:latin typeface="Verdana"/>
               </a:rPr>
-              <a:t>&lt;b&gt;ce&lt;/b&gt;, &lt;b&gt;cet&lt;/b&gt; et &lt;b&gt;cette&lt;/b&gt; accompagnent un nom ; &lt;b&gt;celui&lt;/b&gt; et &lt;b&gt;celle&lt;/b&gt; le remplacent. On ne peut pas avoir les deux : soit le nom, soit le pronom, jamais les deux ensemble.</a:t>
+              <a:t>, </a:t>
+            </a:r>
+            <a:r>
+              <a:rPr sz="2000" b="1" i="0">
+                <a:solidFill>
+                  <a:srgbClr val="4B4F52"/>
+                </a:solidFill>
+                <a:latin typeface="Verdana"/>
+              </a:rPr>
+              <a:t>cet</a:t>
+            </a:r>
+            <a:r>
+              <a:rPr sz="2000" b="0" i="0">
+                <a:solidFill>
+                  <a:srgbClr val="4B4F52"/>
+                </a:solidFill>
+                <a:latin typeface="Verdana"/>
+              </a:rPr>
+              <a:t> et </a:t>
+            </a:r>
+            <a:r>
+              <a:rPr sz="2000" b="1" i="0">
+                <a:solidFill>
+                  <a:srgbClr val="4B4F52"/>
+                </a:solidFill>
+                <a:latin typeface="Verdana"/>
+              </a:rPr>
+              <a:t>cette</a:t>
+            </a:r>
+            <a:r>
+              <a:rPr sz="2000" b="0" i="0">
+                <a:solidFill>
+                  <a:srgbClr val="4B4F52"/>
+                </a:solidFill>
+                <a:latin typeface="Verdana"/>
+              </a:rPr>
+              <a:t> accompagnent un nom ; </a:t>
+            </a:r>
+            <a:r>
+              <a:rPr sz="2000" b="1" i="0">
+                <a:solidFill>
+                  <a:srgbClr val="4B4F52"/>
+                </a:solidFill>
+                <a:latin typeface="Verdana"/>
+              </a:rPr>
+              <a:t>celui</a:t>
+            </a:r>
+            <a:r>
+              <a:rPr sz="2000" b="0" i="0">
+                <a:solidFill>
+                  <a:srgbClr val="4B4F52"/>
+                </a:solidFill>
+                <a:latin typeface="Verdana"/>
+              </a:rPr>
+              <a:t> et </a:t>
+            </a:r>
+            <a:r>
+              <a:rPr sz="2000" b="1" i="0">
+                <a:solidFill>
+                  <a:srgbClr val="4B4F52"/>
+                </a:solidFill>
+                <a:latin typeface="Verdana"/>
+              </a:rPr>
+              <a:t>celle</a:t>
+            </a:r>
+            <a:r>
+              <a:rPr sz="2000" b="0" i="0">
+                <a:solidFill>
+                  <a:srgbClr val="4B4F52"/>
+                </a:solidFill>
+                <a:latin typeface="Verdana"/>
+              </a:rPr>
+              <a:t> le remplacent. On ne peut pas avoir les deux : soit le nom, soit le pronom, jamais les deux ensemble.</a:t>
             </a:r>
           </a:p>
         </p:txBody>
